--- a/自动化模板4.pptx
+++ b/自动化模板4.pptx
@@ -3645,7 +3645,21 @@
             </a:r>
             <a:r>
               <a:rPr lang="en-US" altLang="zh-CN" sz="2400" dirty="0"/>
-              <a:t>500g</a:t>
+              <a:t> VAL_</a:t>
+            </a:r>
+            <a:r>
+              <a:rPr lang="en-US" altLang="zh-CN" sz="2400">
+                <a:sym typeface="+mn-ea"/>
+              </a:rPr>
+              <a:t>tijiyanghua</a:t>
+            </a:r>
+            <a:r>
+              <a:rPr lang="en-US" altLang="zh-CN" sz="2400" dirty="0"/>
+              <a:t> </a:t>
+            </a:r>
+            <a:r>
+              <a:rPr lang="en-US" altLang="zh-CN" sz="2400" dirty="0"/>
+              <a:t>g</a:t>
             </a:r>
             <a:r>
               <a:rPr lang="zh-CN" altLang="en-US" sz="2400" dirty="0"/>
@@ -3682,7 +3696,7 @@
             </a:r>
             <a:r>
               <a:rPr lang="en-US" altLang="zh-CN"/>
-              <a:t>tijiyanghuazha</a:t>
+              <a:t>tijiyanghua</a:t>
             </a:r>
             <a:endParaRPr lang="en-US" altLang="zh-CN"/>
           </a:p>
@@ -4356,7 +4370,7 @@
         <p:spPr>
           <a:xfrm>
             <a:off x="1645920" y="6203315"/>
-            <a:ext cx="7358380" cy="460375"/>
+            <a:ext cx="9793605" cy="460375"/>
           </a:xfrm>
           <a:prstGeom prst="rect">
             <a:avLst/>
@@ -4383,7 +4397,29 @@
             </a:r>
             <a:r>
               <a:rPr lang="en-US" altLang="zh-CN" sz="2400" dirty="0"/>
-              <a:t>0.75cm³</a:t>
+              <a:t> </a:t>
+            </a:r>
+            <a:r>
+              <a:rPr lang="en-US" altLang="zh-CN" sz="2400" dirty="0">
+                <a:sym typeface="+mn-ea"/>
+              </a:rPr>
+              <a:t>VAL_</a:t>
+            </a:r>
+            <a:r>
+              <a:rPr lang="en-US" altLang="zh-CN" sz="2400">
+                <a:sym typeface="+mn-ea"/>
+              </a:rPr>
+              <a:t>suokongtiji</a:t>
+            </a:r>
+            <a:r>
+              <a:rPr lang="en-US" altLang="zh-CN" sz="2400">
+                <a:sym typeface="+mn-ea"/>
+              </a:rPr>
+              <a:t> </a:t>
+            </a:r>
+            <a:r>
+              <a:rPr lang="en-US" altLang="zh-CN" sz="2400" dirty="0"/>
+              <a:t>cm³</a:t>
             </a:r>
             <a:r>
               <a:rPr lang="zh-CN" altLang="en-US" sz="2400" dirty="0"/>
@@ -5560,7 +5596,29 @@
             </a:r>
             <a:r>
               <a:rPr lang="en-US" altLang="zh-CN" sz="2400" dirty="0"/>
-              <a:t>0.06g</a:t>
+              <a:t> </a:t>
+            </a:r>
+            <a:r>
+              <a:rPr lang="en-US" altLang="zh-CN" sz="2400" dirty="0">
+                <a:sym typeface="+mn-ea"/>
+              </a:rPr>
+              <a:t>VAL_</a:t>
+            </a:r>
+            <a:r>
+              <a:rPr lang="en-US" altLang="zh-CN" sz="2400">
+                <a:sym typeface="+mn-ea"/>
+              </a:rPr>
+              <a:t>TIJIJUANQI</a:t>
+            </a:r>
+            <a:r>
+              <a:rPr lang="en-US" altLang="zh-CN" sz="2400">
+                <a:sym typeface="+mn-ea"/>
+              </a:rPr>
+              <a:t> </a:t>
+            </a:r>
+            <a:r>
+              <a:rPr lang="en-US" altLang="zh-CN" sz="2400" dirty="0"/>
+              <a:t>g</a:t>
             </a:r>
             <a:r>
               <a:rPr lang="zh-CN" altLang="en-US" sz="2400" dirty="0"/>

--- a/自动化模板4.pptx
+++ b/自动化模板4.pptx
@@ -5195,7 +5195,7 @@
         </p:nvSpPr>
         <p:spPr>
           <a:xfrm>
-            <a:off x="1337310" y="6220460"/>
+            <a:off x="965835" y="5575935"/>
             <a:ext cx="9258300" cy="368300"/>
           </a:xfrm>
           <a:prstGeom prst="rect">
@@ -5210,6 +5210,10 @@
           <a:lstStyle/>
           <a:p>
             <a:pPr algn="just"/>
+            <a:r>
+              <a:rPr lang="en-US" altLang="zh-CN" dirty="0"/>
+              <a:t>AI_wendu  </a:t>
+            </a:r>
             <a:r>
               <a:rPr lang="zh-CN" altLang="en-US" dirty="0"/>
               <a:t>充填结束阶段铸件平均料液温度处于液相线以上。冷料风险</a:t>
@@ -5475,7 +5479,7 @@
         <p:spPr>
           <a:xfrm>
             <a:off x="946150" y="6028055"/>
-            <a:ext cx="10043160" cy="460375"/>
+            <a:ext cx="10043160" cy="368300"/>
           </a:xfrm>
           <a:prstGeom prst="rect">
             <a:avLst/>
@@ -5490,14 +5494,14 @@
           <a:p>
             <a:pPr algn="just"/>
             <a:r>
-              <a:rPr lang="zh-CN" altLang="en-US" sz="2400" dirty="0"/>
-              <a:t>大部分卷气能顺着渣包方向被收集，但是箭头所示部位，存在轻微卷</a:t>
-            </a:r>
-            <a:r>
-              <a:rPr lang="zh-CN" altLang="en-US" sz="2400" dirty="0"/>
-              <a:t>气。</a:t>
-            </a:r>
-            <a:endParaRPr lang="zh-CN" altLang="en-US" sz="2400" dirty="0"/>
+              <a:rPr lang="en-US" altLang="zh-CN" dirty="0"/>
+              <a:t>AI_JUANQI </a:t>
+            </a:r>
+            <a:r>
+              <a:rPr lang="zh-CN" altLang="en-US" dirty="0"/>
+              <a:t>大部分卷气能顺着渣包方向被收集，但是箭头所示部位，存在轻微卷气。</a:t>
+            </a:r>
+            <a:endParaRPr lang="zh-CN" altLang="en-US" dirty="0"/>
           </a:p>
         </p:txBody>
       </p:sp>
@@ -5524,7 +5528,7 @@
           <a:p>
             <a:r>
               <a:rPr lang="en-US" altLang="zh-CN"/>
-              <a:t>VID_JUANQI</a:t>
+              <a:t>IMG_JUANQI</a:t>
             </a:r>
             <a:endParaRPr lang="en-US" altLang="zh-CN"/>
           </a:p>

--- a/自动化模板4.pptx
+++ b/自动化模板4.pptx
@@ -3216,11 +3216,7 @@
             </a:r>
             <a:r>
               <a:rPr lang="zh-CN" altLang="en-US" sz="2400" dirty="0"/>
-              <a:t>主要集中在卷气</a:t>
-            </a:r>
-            <a:r>
-              <a:rPr lang="zh-CN" altLang="en-US" sz="2400" dirty="0"/>
-              <a:t>较多区</a:t>
+              <a:t>主要集中在卷气较多区</a:t>
             </a:r>
             <a:r>
               <a:rPr lang="en-US" altLang="zh-CN" sz="2400" dirty="0">
@@ -3244,7 +3240,7 @@
                   <a:srgbClr val="FF0000"/>
                 </a:solidFill>
               </a:rPr>
-              <a:t>方框标记部位</a:t>
+              <a:t>箭头标记部位</a:t>
             </a:r>
             <a:r>
               <a:rPr lang="en-US" altLang="zh-CN" sz="2400" dirty="0">
@@ -3504,14 +3500,14 @@
       </p:grpSpPr>
       <p:sp>
         <p:nvSpPr>
-          <p:cNvPr id="3" name="文本框 2"/>
+          <p:cNvPr id="4" name="文本框 3"/>
           <p:cNvSpPr txBox="1"/>
           <p:nvPr/>
         </p:nvSpPr>
         <p:spPr>
           <a:xfrm>
-            <a:off x="179187" y="5957939"/>
-            <a:ext cx="11141476" cy="829945"/>
+            <a:off x="70485" y="0"/>
+            <a:ext cx="12041505" cy="5491480"/>
           </a:xfrm>
           <a:prstGeom prst="rect">
             <a:avLst/>
@@ -3520,32 +3516,27 @@
         </p:spPr>
         <p:txBody>
           <a:bodyPr wrap="square" rtlCol="0">
-            <a:spAutoFit/>
+            <a:noAutofit/>
           </a:bodyPr>
-          <a:lstStyle/>
-          <a:p>
-            <a:r>
-              <a:rPr lang="zh-CN" altLang="en-US" sz="2400" dirty="0"/>
-              <a:t>铸件内氧化物含量较高，渣包体积太小，导致熔渣无法充分排出，</a:t>
-            </a:r>
-            <a:r>
-              <a:rPr lang="zh-CN" altLang="en-US" sz="2400" dirty="0"/>
-              <a:t>氧化夹杂风险显著升高。</a:t>
-            </a:r>
-            <a:endParaRPr lang="zh-CN" altLang="en-US" sz="2400" dirty="0"/>
-          </a:p>
-        </p:txBody>
-      </p:sp>
-      <p:sp>
-        <p:nvSpPr>
-          <p:cNvPr id="4" name="文本框 3"/>
+          <a:p>
+            <a:r>
+              <a:rPr lang="en-US" altLang="zh-CN"/>
+              <a:t>IMG_yanghuazha</a:t>
+            </a:r>
+            <a:endParaRPr lang="en-US" altLang="zh-CN"/>
+          </a:p>
+        </p:txBody>
+      </p:sp>
+      <p:sp>
+        <p:nvSpPr>
+          <p:cNvPr id="2" name="文本框 1"/>
           <p:cNvSpPr txBox="1"/>
           <p:nvPr/>
         </p:nvSpPr>
         <p:spPr>
           <a:xfrm>
-            <a:off x="70485" y="0"/>
-            <a:ext cx="12041505" cy="5491480"/>
+            <a:off x="98542" y="6236704"/>
+            <a:ext cx="11141476" cy="460375"/>
           </a:xfrm>
           <a:prstGeom prst="rect">
             <a:avLst/>
@@ -3554,14 +3545,27 @@
         </p:spPr>
         <p:txBody>
           <a:bodyPr wrap="square" rtlCol="0">
-            <a:noAutofit/>
+            <a:spAutoFit/>
           </a:bodyPr>
-          <a:p>
-            <a:r>
-              <a:rPr lang="en-US" altLang="zh-CN"/>
-              <a:t>IMG_yanghuazha</a:t>
-            </a:r>
-            <a:endParaRPr lang="en-US" altLang="zh-CN"/>
+          <a:lstStyle/>
+          <a:p>
+            <a:r>
+              <a:rPr lang="zh-CN" altLang="en-US" sz="2400" dirty="0"/>
+              <a:t>铸件内氧化物主要集中在</a:t>
+            </a:r>
+            <a:r>
+              <a:rPr lang="en-US" altLang="zh-CN" sz="2400" dirty="0"/>
+              <a:t>   </a:t>
+            </a:r>
+            <a:r>
+              <a:rPr lang="zh-CN" altLang="en-US" sz="2400" dirty="0"/>
+              <a:t>。建议加大对应部位的渣包</a:t>
+            </a:r>
+            <a:r>
+              <a:rPr lang="zh-CN" altLang="en-US" sz="2400" dirty="0"/>
+              <a:t>体积。</a:t>
+            </a:r>
+            <a:endParaRPr lang="zh-CN" altLang="en-US" sz="2400" dirty="0"/>
           </a:p>
         </p:txBody>
       </p:sp>
@@ -3621,7 +3625,7 @@
           <a:p>
             <a:r>
               <a:rPr lang="zh-CN" altLang="en-US" sz="2400" dirty="0"/>
-              <a:t>铸件内氧化物含量较高，约为</a:t>
+              <a:t>铸件内氧化物含量约为</a:t>
             </a:r>
             <a:r>
               <a:rPr lang="en-US" altLang="zh-CN" sz="2400" dirty="0"/>
@@ -4136,40 +4140,6 @@
           </a:p>
         </p:txBody>
       </p:sp>
-      <p:sp>
-        <p:nvSpPr>
-          <p:cNvPr id="2" name="文本框 1"/>
-          <p:cNvSpPr txBox="1"/>
-          <p:nvPr/>
-        </p:nvSpPr>
-        <p:spPr>
-          <a:xfrm>
-            <a:off x="4014773" y="5961034"/>
-            <a:ext cx="4163626" cy="368300"/>
-          </a:xfrm>
-          <a:prstGeom prst="rect">
-            <a:avLst/>
-          </a:prstGeom>
-          <a:noFill/>
-        </p:spPr>
-        <p:txBody>
-          <a:bodyPr wrap="square" rtlCol="0">
-            <a:spAutoFit/>
-          </a:bodyPr>
-          <a:lstStyle/>
-          <a:p>
-            <a:r>
-              <a:rPr lang="zh-CN" altLang="en-US" dirty="0"/>
-              <a:t>工艺抽真空与</a:t>
-            </a:r>
-            <a:r>
-              <a:rPr lang="zh-CN" altLang="en-US" dirty="0"/>
-              <a:t>点冷</a:t>
-            </a:r>
-            <a:endParaRPr lang="zh-CN" altLang="en-US" dirty="0"/>
-          </a:p>
-        </p:txBody>
-      </p:sp>
     </p:spTree>
   </p:cSld>
   <p:clrMapOvr>
@@ -4945,7 +4915,13 @@
               <a:rPr lang="en-US" altLang="zh-CN" sz="3200" dirty="0">
                 <a:sym typeface="+mn-ea"/>
               </a:rPr>
-              <a:t>0.55%</a:t>
+              <a:t>VAL_</a:t>
+            </a:r>
+            <a:r>
+              <a:rPr lang="en-US" altLang="zh-CN" sz="3200">
+                <a:sym typeface="+mn-ea"/>
+              </a:rPr>
+              <a:t>suokonglv </a:t>
             </a:r>
             <a:r>
               <a:rPr lang="zh-CN" altLang="en-US" sz="3200" dirty="0">
@@ -4957,7 +4933,19 @@
               <a:rPr lang="en-US" altLang="zh-CN" sz="3200" dirty="0">
                 <a:sym typeface="+mn-ea"/>
               </a:rPr>
-              <a:t>25cm³</a:t>
+              <a:t> </a:t>
+            </a:r>
+            <a:r>
+              <a:rPr lang="en-US" altLang="zh-CN" sz="3200" dirty="0">
+                <a:sym typeface="+mn-ea"/>
+              </a:rPr>
+              <a:t>VAL_</a:t>
+            </a:r>
+            <a:r>
+              <a:rPr lang="en-US" altLang="zh-CN" sz="3200">
+                <a:sym typeface="+mn-ea"/>
+              </a:rPr>
+              <a:t>suokongtiji </a:t>
             </a:r>
             <a:r>
               <a:rPr lang="zh-CN" altLang="en-US" sz="3200" dirty="0">
@@ -5211,10 +5199,6 @@
           <a:p>
             <a:pPr algn="just"/>
             <a:r>
-              <a:rPr lang="en-US" altLang="zh-CN" dirty="0"/>
-              <a:t>AI_wendu  </a:t>
-            </a:r>
-            <a:r>
               <a:rPr lang="zh-CN" altLang="en-US" dirty="0"/>
               <a:t>充填结束阶段铸件平均料液温度处于液相线以上。冷料风险</a:t>
             </a:r>
@@ -5495,7 +5479,7 @@
             <a:pPr algn="just"/>
             <a:r>
               <a:rPr lang="en-US" altLang="zh-CN" dirty="0"/>
-              <a:t>AI_JUANQI </a:t>
+              <a:t> </a:t>
             </a:r>
             <a:r>
               <a:rPr lang="zh-CN" altLang="en-US" dirty="0"/>

--- a/自动化模板4.pptx
+++ b/自动化模板4.pptx
@@ -3138,7 +3138,7 @@
         <p:spPr>
           <a:xfrm>
             <a:off x="70485" y="476885"/>
-            <a:ext cx="12041505" cy="5014595"/>
+            <a:ext cx="12041505" cy="5775960"/>
           </a:xfrm>
           <a:prstGeom prst="rect">
             <a:avLst/>
@@ -3267,7 +3267,7 @@
         <p:spPr>
           <a:xfrm>
             <a:off x="70485" y="109220"/>
-            <a:ext cx="12041505" cy="5382260"/>
+            <a:ext cx="12041505" cy="5889625"/>
           </a:xfrm>
           <a:prstGeom prst="rect">
             <a:avLst/>
@@ -3351,7 +3351,7 @@
         <p:spPr>
           <a:xfrm>
             <a:off x="70485" y="476885"/>
-            <a:ext cx="12041505" cy="5014595"/>
+            <a:ext cx="12041505" cy="5739765"/>
           </a:xfrm>
           <a:prstGeom prst="rect">
             <a:avLst/>
@@ -3442,7 +3442,7 @@
         <p:spPr>
           <a:xfrm>
             <a:off x="70485" y="476885"/>
-            <a:ext cx="12041505" cy="5014595"/>
+            <a:ext cx="12041505" cy="5758180"/>
           </a:xfrm>
           <a:prstGeom prst="rect">
             <a:avLst/>
@@ -3507,7 +3507,7 @@
         <p:spPr>
           <a:xfrm>
             <a:off x="70485" y="0"/>
-            <a:ext cx="12041505" cy="5491480"/>
+            <a:ext cx="12041505" cy="5582285"/>
           </a:xfrm>
           <a:prstGeom prst="rect">
             <a:avLst/>
@@ -3753,7 +3753,7 @@
         <p:spPr>
           <a:xfrm>
             <a:off x="70485" y="340995"/>
-            <a:ext cx="12041505" cy="5491480"/>
+            <a:ext cx="12041505" cy="5908040"/>
           </a:xfrm>
           <a:prstGeom prst="rect">
             <a:avLst/>
@@ -3941,7 +3941,7 @@
         <p:spPr>
           <a:xfrm>
             <a:off x="70485" y="340995"/>
-            <a:ext cx="12041505" cy="5491480"/>
+            <a:ext cx="12041505" cy="5854700"/>
           </a:xfrm>
           <a:prstGeom prst="rect">
             <a:avLst/>
@@ -4498,7 +4498,7 @@
         <p:spPr>
           <a:xfrm>
             <a:off x="70485" y="340995"/>
-            <a:ext cx="12041505" cy="5491480"/>
+            <a:ext cx="12041505" cy="5835650"/>
           </a:xfrm>
           <a:prstGeom prst="rect">
             <a:avLst/>
@@ -5119,7 +5119,7 @@
         <p:spPr>
           <a:xfrm>
             <a:off x="70485" y="476885"/>
-            <a:ext cx="12041505" cy="5014595"/>
+            <a:ext cx="12041505" cy="5975350"/>
           </a:xfrm>
           <a:prstGeom prst="rect">
             <a:avLst/>
@@ -5183,7 +5183,7 @@
         </p:nvSpPr>
         <p:spPr>
           <a:xfrm>
-            <a:off x="965835" y="5575935"/>
+            <a:off x="965835" y="6101715"/>
             <a:ext cx="9258300" cy="368300"/>
           </a:xfrm>
           <a:prstGeom prst="rect">
@@ -5219,7 +5219,7 @@
         <p:spPr>
           <a:xfrm>
             <a:off x="70485" y="132080"/>
-            <a:ext cx="12041505" cy="5286375"/>
+            <a:ext cx="12041505" cy="5667375"/>
           </a:xfrm>
           <a:prstGeom prst="rect">
             <a:avLst/>
@@ -5307,7 +5307,7 @@
         <p:spPr>
           <a:xfrm>
             <a:off x="70485" y="476885"/>
-            <a:ext cx="12041505" cy="5014595"/>
+            <a:ext cx="12041505" cy="5939155"/>
           </a:xfrm>
           <a:prstGeom prst="rect">
             <a:avLst/>
@@ -5402,7 +5402,7 @@
         <p:spPr>
           <a:xfrm>
             <a:off x="70485" y="476885"/>
-            <a:ext cx="12041505" cy="5014595"/>
+            <a:ext cx="12041505" cy="6066155"/>
           </a:xfrm>
           <a:prstGeom prst="rect">
             <a:avLst/>
@@ -5498,7 +5498,7 @@
         <p:spPr>
           <a:xfrm>
             <a:off x="70485" y="64135"/>
-            <a:ext cx="12041505" cy="5427345"/>
+            <a:ext cx="12041505" cy="5717540"/>
           </a:xfrm>
           <a:prstGeom prst="rect">
             <a:avLst/>
@@ -5609,7 +5609,7 @@
         <p:spPr>
           <a:xfrm>
             <a:off x="70485" y="109220"/>
-            <a:ext cx="12041505" cy="5382260"/>
+            <a:ext cx="12041505" cy="6035675"/>
           </a:xfrm>
           <a:prstGeom prst="rect">
             <a:avLst/>
